--- a/presentation/Market_Intelligence_Platform.pptx
+++ b/presentation/Market_Intelligence_Platform.pptx
@@ -11039,7 +11039,7 @@
                 <a:ea typeface="Cambria" pitchFamily="34" charset="-122"/>
                 <a:cs typeface="Cambria" pitchFamily="34" charset="-120"/>
               </a:rPr>
-              <a:t>What I owned vs. what the agent owned</a:t>
+              <a:t>Lead the standard, stay hands-on where it's risky</a:t>
             </a:r>
             <a:endParaRPr lang="en-US" sz="2800" dirty="0"/>
           </a:p>
@@ -11078,854 +11078,65 @@
                 <a:ea typeface="Calibri" pitchFamily="34" charset="-122"/>
                 <a:cs typeface="Calibri" pitchFamily="34" charset="-120"/>
               </a:rPr>
-              <a:t>Team &amp; standards</a:t>
+              <a:t>Team &amp; standards — how I'd lead this with a team, not just delegate it</a:t>
             </a:r>
             <a:endParaRPr lang="en-US" sz="1300" dirty="0"/>
           </a:p>
         </p:txBody>
       </p:sp>
-      <p:graphicFrame>
-        <p:nvGraphicFramePr>
-          <p:cNvPr id="10" name="Table 0"/>
-          <p:cNvGraphicFramePr>
-            <a:graphicFrameLocks noGrp="1"/>
-          </p:cNvGraphicFramePr>
-          <p:nvPr>
-            <p:extLst>
-              <p:ext uri="{D42A27DB-BD31-4B8C-83A1-F6EECF244321}">
-                <p14:modId xmlns:p14="http://schemas.microsoft.com/office/powerpoint/2010/main" val="1579011935"/>
-              </p:ext>
-            </p:extLst>
-          </p:nvPr>
-        </p:nvGraphicFramePr>
-        <p:xfrm>
-          <a:off x="548640" y="1417320"/>
-          <a:ext cx="11091672" cy="2834640"/>
-        </p:xfrm>
-        <a:graphic>
-          <a:graphicData uri="http://schemas.openxmlformats.org/drawingml/2006/table">
-            <a:tbl>
-              <a:tblPr/>
-              <a:tblGrid>
-                <a:gridCol w="5541264"/>
-                <a:gridCol w="5550408"/>
-              </a:tblGrid>
-              <a:tr h="475488">
-                <a:tc>
-                  <a:txBody>
-                    <a:bodyPr/>
-                    <a:lstStyle/>
-                    <a:p>
-                      <a:pPr indent="0" marL="0">
-                        <a:buNone/>
-                      </a:pPr>
-                      <a:r>
-                        <a:rPr lang="en-US" sz="1150" b="1" dirty="0">
-                          <a:solidFill>
-                            <a:srgbClr val="FFFFFF"/>
-                          </a:solidFill>
-                          <a:latin typeface="Calibri" pitchFamily="34" charset="0"/>
-                          <a:ea typeface="Calibri" pitchFamily="34" charset="-122"/>
-                          <a:cs typeface="Calibri" pitchFamily="34" charset="-120"/>
-                        </a:rPr>
-                        <a:t>Owned by lead</a:t>
-                      </a:r>
-                      <a:endParaRPr lang="en-US" sz="1150" dirty="0">
-                        <a:latin typeface="Calibri" charset="0"/>
-                        <a:ea typeface="Calibri" charset="0"/>
-                        <a:cs typeface="Calibri" charset="0"/>
-                      </a:endParaRPr>
-                    </a:p>
-                  </a:txBody>
-                  <a:tcPr marL="91440" marR="91440" marT="45720" marB="45720" anchor="ctr">
-                    <a:lnL w="9525" cap="flat" cmpd="sng" algn="ctr">
-                      <a:solidFill>
-                        <a:srgbClr val="CADCFC"/>
-                      </a:solidFill>
-                      <a:prstDash val="solid"/>
-                      <a:round/>
-                      <a:headEnd type="none" w="med" len="med"/>
-                      <a:tailEnd type="none" w="med" len="med"/>
-                    </a:lnL>
-                    <a:lnR w="9525" cap="flat" cmpd="sng" algn="ctr">
-                      <a:solidFill>
-                        <a:srgbClr val="CADCFC"/>
-                      </a:solidFill>
-                      <a:prstDash val="solid"/>
-                      <a:round/>
-                      <a:headEnd type="none" w="med" len="med"/>
-                      <a:tailEnd type="none" w="med" len="med"/>
-                    </a:lnR>
-                    <a:lnT w="9525" cap="flat" cmpd="sng" algn="ctr">
-                      <a:solidFill>
-                        <a:srgbClr val="CADCFC"/>
-                      </a:solidFill>
-                      <a:prstDash val="solid"/>
-                      <a:round/>
-                      <a:headEnd type="none" w="med" len="med"/>
-                      <a:tailEnd type="none" w="med" len="med"/>
-                    </a:lnT>
-                    <a:lnB w="9525" cap="flat" cmpd="sng" algn="ctr">
-                      <a:solidFill>
-                        <a:srgbClr val="CADCFC"/>
-                      </a:solidFill>
-                      <a:prstDash val="solid"/>
-                      <a:round/>
-                      <a:headEnd type="none" w="med" len="med"/>
-                      <a:tailEnd type="none" w="med" len="med"/>
-                    </a:lnB>
-                    <a:solidFill>
-                      <a:srgbClr val="1E2761"/>
-                    </a:solidFill>
-                  </a:tcPr>
-                </a:tc>
-                <a:tc>
-                  <a:txBody>
-                    <a:bodyPr/>
-                    <a:lstStyle/>
-                    <a:p>
-                      <a:pPr indent="0" marL="0">
-                        <a:buNone/>
-                      </a:pPr>
-                      <a:r>
-                        <a:rPr lang="en-US" sz="1150" b="1" dirty="0">
-                          <a:solidFill>
-                            <a:srgbClr val="FFFFFF"/>
-                          </a:solidFill>
-                          <a:latin typeface="Calibri" pitchFamily="34" charset="0"/>
-                          <a:ea typeface="Calibri" pitchFamily="34" charset="-122"/>
-                          <a:cs typeface="Calibri" pitchFamily="34" charset="-120"/>
-                        </a:rPr>
-                        <a:t>Owned by agent (supervised)</a:t>
-                      </a:r>
-                      <a:endParaRPr lang="en-US" sz="1150" dirty="0">
-                        <a:latin typeface="Calibri" charset="0"/>
-                        <a:ea typeface="Calibri" charset="0"/>
-                        <a:cs typeface="Calibri" charset="0"/>
-                      </a:endParaRPr>
-                    </a:p>
-                  </a:txBody>
-                  <a:tcPr marL="91440" marR="91440" marT="45720" marB="45720" anchor="ctr">
-                    <a:lnL w="9525" cap="flat" cmpd="sng" algn="ctr">
-                      <a:solidFill>
-                        <a:srgbClr val="CADCFC"/>
-                      </a:solidFill>
-                      <a:prstDash val="solid"/>
-                      <a:round/>
-                      <a:headEnd type="none" w="med" len="med"/>
-                      <a:tailEnd type="none" w="med" len="med"/>
-                    </a:lnL>
-                    <a:lnR w="9525" cap="flat" cmpd="sng" algn="ctr">
-                      <a:solidFill>
-                        <a:srgbClr val="CADCFC"/>
-                      </a:solidFill>
-                      <a:prstDash val="solid"/>
-                      <a:round/>
-                      <a:headEnd type="none" w="med" len="med"/>
-                      <a:tailEnd type="none" w="med" len="med"/>
-                    </a:lnR>
-                    <a:lnT w="9525" cap="flat" cmpd="sng" algn="ctr">
-                      <a:solidFill>
-                        <a:srgbClr val="CADCFC"/>
-                      </a:solidFill>
-                      <a:prstDash val="solid"/>
-                      <a:round/>
-                      <a:headEnd type="none" w="med" len="med"/>
-                      <a:tailEnd type="none" w="med" len="med"/>
-                    </a:lnT>
-                    <a:lnB w="9525" cap="flat" cmpd="sng" algn="ctr">
-                      <a:solidFill>
-                        <a:srgbClr val="CADCFC"/>
-                      </a:solidFill>
-                      <a:prstDash val="solid"/>
-                      <a:round/>
-                      <a:headEnd type="none" w="med" len="med"/>
-                      <a:tailEnd type="none" w="med" len="med"/>
-                    </a:lnB>
-                    <a:solidFill>
-                      <a:srgbClr val="1E2761"/>
-                    </a:solidFill>
-                  </a:tcPr>
-                </a:tc>
-              </a:tr>
-              <a:tr h="475488">
-                <a:tc>
-                  <a:txBody>
-                    <a:bodyPr/>
-                    <a:lstStyle/>
-                    <a:p>
-                      <a:pPr indent="0" marL="0">
-                        <a:buNone/>
-                      </a:pPr>
-                      <a:r>
-                        <a:rPr lang="en-US" sz="1150" dirty="0">
-                          <a:solidFill>
-                            <a:srgbClr val="1B1F3B"/>
-                          </a:solidFill>
-                          <a:latin typeface="Calibri" pitchFamily="34" charset="0"/>
-                          <a:ea typeface="Calibri" pitchFamily="34" charset="-122"/>
-                          <a:cs typeface="Calibri" pitchFamily="34" charset="-120"/>
-                        </a:rPr>
-                        <a:t>Source &amp; metric selection, threshold rationale</a:t>
-                      </a:r>
-                      <a:endParaRPr lang="en-US" sz="1150" dirty="0">
-                        <a:latin typeface="Calibri" charset="0"/>
-                        <a:ea typeface="Calibri" charset="0"/>
-                        <a:cs typeface="Calibri" charset="0"/>
-                      </a:endParaRPr>
-                    </a:p>
-                  </a:txBody>
-                  <a:tcPr marL="91440" marR="91440" marT="45720" marB="45720" anchor="ctr">
-                    <a:lnL w="9525" cap="flat" cmpd="sng" algn="ctr">
-                      <a:solidFill>
-                        <a:srgbClr val="CADCFC"/>
-                      </a:solidFill>
-                      <a:prstDash val="solid"/>
-                      <a:round/>
-                      <a:headEnd type="none" w="med" len="med"/>
-                      <a:tailEnd type="none" w="med" len="med"/>
-                    </a:lnL>
-                    <a:lnR w="9525" cap="flat" cmpd="sng" algn="ctr">
-                      <a:solidFill>
-                        <a:srgbClr val="CADCFC"/>
-                      </a:solidFill>
-                      <a:prstDash val="solid"/>
-                      <a:round/>
-                      <a:headEnd type="none" w="med" len="med"/>
-                      <a:tailEnd type="none" w="med" len="med"/>
-                    </a:lnR>
-                    <a:lnT w="9525" cap="flat" cmpd="sng" algn="ctr">
-                      <a:solidFill>
-                        <a:srgbClr val="CADCFC"/>
-                      </a:solidFill>
-                      <a:prstDash val="solid"/>
-                      <a:round/>
-                      <a:headEnd type="none" w="med" len="med"/>
-                      <a:tailEnd type="none" w="med" len="med"/>
-                    </a:lnT>
-                    <a:lnB w="9525" cap="flat" cmpd="sng" algn="ctr">
-                      <a:solidFill>
-                        <a:srgbClr val="CADCFC"/>
-                      </a:solidFill>
-                      <a:prstDash val="solid"/>
-                      <a:round/>
-                      <a:headEnd type="none" w="med" len="med"/>
-                      <a:tailEnd type="none" w="med" len="med"/>
-                    </a:lnB>
-                  </a:tcPr>
-                </a:tc>
-                <a:tc>
-                  <a:txBody>
-                    <a:bodyPr/>
-                    <a:lstStyle/>
-                    <a:p>
-                      <a:pPr indent="0" marL="0">
-                        <a:buNone/>
-                      </a:pPr>
-                      <a:r>
-                        <a:rPr lang="en-US" sz="1150" dirty="0">
-                          <a:solidFill>
-                            <a:srgbClr val="1B1F3B"/>
-                          </a:solidFill>
-                          <a:latin typeface="Calibri" pitchFamily="34" charset="0"/>
-                          <a:ea typeface="Calibri" pitchFamily="34" charset="-122"/>
-                          <a:cs typeface="Calibri" pitchFamily="34" charset="-120"/>
-                        </a:rPr>
-                        <a:t>Boilerplate scaffolding, extractor implementation</a:t>
-                      </a:r>
-                      <a:endParaRPr lang="en-US" sz="1150" dirty="0">
-                        <a:latin typeface="Calibri" charset="0"/>
-                        <a:ea typeface="Calibri" charset="0"/>
-                        <a:cs typeface="Calibri" charset="0"/>
-                      </a:endParaRPr>
-                    </a:p>
-                  </a:txBody>
-                  <a:tcPr marL="91440" marR="91440" marT="45720" marB="45720" anchor="ctr">
-                    <a:lnL w="9525" cap="flat" cmpd="sng" algn="ctr">
-                      <a:solidFill>
-                        <a:srgbClr val="CADCFC"/>
-                      </a:solidFill>
-                      <a:prstDash val="solid"/>
-                      <a:round/>
-                      <a:headEnd type="none" w="med" len="med"/>
-                      <a:tailEnd type="none" w="med" len="med"/>
-                    </a:lnL>
-                    <a:lnR w="9525" cap="flat" cmpd="sng" algn="ctr">
-                      <a:solidFill>
-                        <a:srgbClr val="CADCFC"/>
-                      </a:solidFill>
-                      <a:prstDash val="solid"/>
-                      <a:round/>
-                      <a:headEnd type="none" w="med" len="med"/>
-                      <a:tailEnd type="none" w="med" len="med"/>
-                    </a:lnR>
-                    <a:lnT w="9525" cap="flat" cmpd="sng" algn="ctr">
-                      <a:solidFill>
-                        <a:srgbClr val="CADCFC"/>
-                      </a:solidFill>
-                      <a:prstDash val="solid"/>
-                      <a:round/>
-                      <a:headEnd type="none" w="med" len="med"/>
-                      <a:tailEnd type="none" w="med" len="med"/>
-                    </a:lnT>
-                    <a:lnB w="9525" cap="flat" cmpd="sng" algn="ctr">
-                      <a:solidFill>
-                        <a:srgbClr val="CADCFC"/>
-                      </a:solidFill>
-                      <a:prstDash val="solid"/>
-                      <a:round/>
-                      <a:headEnd type="none" w="med" len="med"/>
-                      <a:tailEnd type="none" w="med" len="med"/>
-                    </a:lnB>
-                  </a:tcPr>
-                </a:tc>
-              </a:tr>
-              <a:tr h="475488">
-                <a:tc>
-                  <a:txBody>
-                    <a:bodyPr/>
-                    <a:lstStyle/>
-                    <a:p>
-                      <a:pPr indent="0" marL="0">
-                        <a:buNone/>
-                      </a:pPr>
-                      <a:r>
-                        <a:rPr lang="en-US" sz="1150" dirty="0">
-                          <a:solidFill>
-                            <a:srgbClr val="1B1F3B"/>
-                          </a:solidFill>
-                          <a:latin typeface="Calibri" pitchFamily="34" charset="0"/>
-                          <a:ea typeface="Calibri" pitchFamily="34" charset="-122"/>
-                          <a:cs typeface="Calibri" pitchFamily="34" charset="-120"/>
-                        </a:rPr>
-                        <a:t>Rubric/requirement compliance checking</a:t>
-                      </a:r>
-                      <a:endParaRPr lang="en-US" sz="1150" dirty="0">
-                        <a:latin typeface="Calibri" charset="0"/>
-                        <a:ea typeface="Calibri" charset="0"/>
-                        <a:cs typeface="Calibri" charset="0"/>
-                      </a:endParaRPr>
-                    </a:p>
-                  </a:txBody>
-                  <a:tcPr marL="91440" marR="91440" marT="45720" marB="45720" anchor="ctr">
-                    <a:lnL w="9525" cap="flat" cmpd="sng" algn="ctr">
-                      <a:solidFill>
-                        <a:srgbClr val="CADCFC"/>
-                      </a:solidFill>
-                      <a:prstDash val="solid"/>
-                      <a:round/>
-                      <a:headEnd type="none" w="med" len="med"/>
-                      <a:tailEnd type="none" w="med" len="med"/>
-                    </a:lnL>
-                    <a:lnR w="9525" cap="flat" cmpd="sng" algn="ctr">
-                      <a:solidFill>
-                        <a:srgbClr val="CADCFC"/>
-                      </a:solidFill>
-                      <a:prstDash val="solid"/>
-                      <a:round/>
-                      <a:headEnd type="none" w="med" len="med"/>
-                      <a:tailEnd type="none" w="med" len="med"/>
-                    </a:lnR>
-                    <a:lnT w="9525" cap="flat" cmpd="sng" algn="ctr">
-                      <a:solidFill>
-                        <a:srgbClr val="CADCFC"/>
-                      </a:solidFill>
-                      <a:prstDash val="solid"/>
-                      <a:round/>
-                      <a:headEnd type="none" w="med" len="med"/>
-                      <a:tailEnd type="none" w="med" len="med"/>
-                    </a:lnT>
-                    <a:lnB w="9525" cap="flat" cmpd="sng" algn="ctr">
-                      <a:solidFill>
-                        <a:srgbClr val="CADCFC"/>
-                      </a:solidFill>
-                      <a:prstDash val="solid"/>
-                      <a:round/>
-                      <a:headEnd type="none" w="med" len="med"/>
-                      <a:tailEnd type="none" w="med" len="med"/>
-                    </a:lnB>
-                  </a:tcPr>
-                </a:tc>
-                <a:tc>
-                  <a:txBody>
-                    <a:bodyPr/>
-                    <a:lstStyle/>
-                    <a:p>
-                      <a:pPr indent="0" marL="0">
-                        <a:buNone/>
-                      </a:pPr>
-                      <a:r>
-                        <a:rPr lang="en-US" sz="1150" dirty="0">
-                          <a:solidFill>
-                            <a:srgbClr val="1B1F3B"/>
-                          </a:solidFill>
-                          <a:latin typeface="Calibri" pitchFamily="34" charset="0"/>
-                          <a:ea typeface="Calibri" pitchFamily="34" charset="-122"/>
-                          <a:cs typeface="Calibri" pitchFamily="34" charset="-120"/>
-                        </a:rPr>
-                        <a:t>Test-writing against a locked spec</a:t>
-                      </a:r>
-                      <a:endParaRPr lang="en-US" sz="1150" dirty="0">
-                        <a:latin typeface="Calibri" charset="0"/>
-                        <a:ea typeface="Calibri" charset="0"/>
-                        <a:cs typeface="Calibri" charset="0"/>
-                      </a:endParaRPr>
-                    </a:p>
-                  </a:txBody>
-                  <a:tcPr marL="91440" marR="91440" marT="45720" marB="45720" anchor="ctr">
-                    <a:lnL w="9525" cap="flat" cmpd="sng" algn="ctr">
-                      <a:solidFill>
-                        <a:srgbClr val="CADCFC"/>
-                      </a:solidFill>
-                      <a:prstDash val="solid"/>
-                      <a:round/>
-                      <a:headEnd type="none" w="med" len="med"/>
-                      <a:tailEnd type="none" w="med" len="med"/>
-                    </a:lnL>
-                    <a:lnR w="9525" cap="flat" cmpd="sng" algn="ctr">
-                      <a:solidFill>
-                        <a:srgbClr val="CADCFC"/>
-                      </a:solidFill>
-                      <a:prstDash val="solid"/>
-                      <a:round/>
-                      <a:headEnd type="none" w="med" len="med"/>
-                      <a:tailEnd type="none" w="med" len="med"/>
-                    </a:lnR>
-                    <a:lnT w="9525" cap="flat" cmpd="sng" algn="ctr">
-                      <a:solidFill>
-                        <a:srgbClr val="CADCFC"/>
-                      </a:solidFill>
-                      <a:prstDash val="solid"/>
-                      <a:round/>
-                      <a:headEnd type="none" w="med" len="med"/>
-                      <a:tailEnd type="none" w="med" len="med"/>
-                    </a:lnT>
-                    <a:lnB w="9525" cap="flat" cmpd="sng" algn="ctr">
-                      <a:solidFill>
-                        <a:srgbClr val="CADCFC"/>
-                      </a:solidFill>
-                      <a:prstDash val="solid"/>
-                      <a:round/>
-                      <a:headEnd type="none" w="med" len="med"/>
-                      <a:tailEnd type="none" w="med" len="med"/>
-                    </a:lnB>
-                  </a:tcPr>
-                </a:tc>
-              </a:tr>
-              <a:tr h="475488">
-                <a:tc>
-                  <a:txBody>
-                    <a:bodyPr/>
-                    <a:lstStyle/>
-                    <a:p>
-                      <a:pPr indent="0" marL="0">
-                        <a:buNone/>
-                      </a:pPr>
-                      <a:r>
-                        <a:rPr lang="en-US" sz="1150" dirty="0">
-                          <a:solidFill>
-                            <a:srgbClr val="1B1F3B"/>
-                          </a:solidFill>
-                          <a:latin typeface="Calibri" pitchFamily="34" charset="0"/>
-                          <a:ea typeface="Calibri" pitchFamily="34" charset="-122"/>
-                          <a:cs typeface="Calibri" pitchFamily="34" charset="-120"/>
-                        </a:rPr>
-                        <a:t>Metric definitions, written before any code</a:t>
-                      </a:r>
-                      <a:endParaRPr lang="en-US" sz="1150" dirty="0">
-                        <a:latin typeface="Calibri" charset="0"/>
-                        <a:ea typeface="Calibri" charset="0"/>
-                        <a:cs typeface="Calibri" charset="0"/>
-                      </a:endParaRPr>
-                    </a:p>
-                  </a:txBody>
-                  <a:tcPr marL="91440" marR="91440" marT="45720" marB="45720" anchor="ctr">
-                    <a:lnL w="9525" cap="flat" cmpd="sng" algn="ctr">
-                      <a:solidFill>
-                        <a:srgbClr val="CADCFC"/>
-                      </a:solidFill>
-                      <a:prstDash val="solid"/>
-                      <a:round/>
-                      <a:headEnd type="none" w="med" len="med"/>
-                      <a:tailEnd type="none" w="med" len="med"/>
-                    </a:lnL>
-                    <a:lnR w="9525" cap="flat" cmpd="sng" algn="ctr">
-                      <a:solidFill>
-                        <a:srgbClr val="CADCFC"/>
-                      </a:solidFill>
-                      <a:prstDash val="solid"/>
-                      <a:round/>
-                      <a:headEnd type="none" w="med" len="med"/>
-                      <a:tailEnd type="none" w="med" len="med"/>
-                    </a:lnR>
-                    <a:lnT w="9525" cap="flat" cmpd="sng" algn="ctr">
-                      <a:solidFill>
-                        <a:srgbClr val="CADCFC"/>
-                      </a:solidFill>
-                      <a:prstDash val="solid"/>
-                      <a:round/>
-                      <a:headEnd type="none" w="med" len="med"/>
-                      <a:tailEnd type="none" w="med" len="med"/>
-                    </a:lnT>
-                    <a:lnB w="9525" cap="flat" cmpd="sng" algn="ctr">
-                      <a:solidFill>
-                        <a:srgbClr val="CADCFC"/>
-                      </a:solidFill>
-                      <a:prstDash val="solid"/>
-                      <a:round/>
-                      <a:headEnd type="none" w="med" len="med"/>
-                      <a:tailEnd type="none" w="med" len="med"/>
-                    </a:lnB>
-                  </a:tcPr>
-                </a:tc>
-                <a:tc>
-                  <a:txBody>
-                    <a:bodyPr/>
-                    <a:lstStyle/>
-                    <a:p>
-                      <a:pPr indent="0" marL="0">
-                        <a:buNone/>
-                      </a:pPr>
-                      <a:r>
-                        <a:rPr lang="en-US" sz="1150" dirty="0">
-                          <a:solidFill>
-                            <a:srgbClr val="1B1F3B"/>
-                          </a:solidFill>
-                          <a:latin typeface="Calibri" pitchFamily="34" charset="0"/>
-                          <a:ea typeface="Calibri" pitchFamily="34" charset="-122"/>
-                          <a:cs typeface="Calibri" pitchFamily="34" charset="-120"/>
-                        </a:rPr>
-                        <a:t>Implementation once spec is approved</a:t>
-                      </a:r>
-                      <a:endParaRPr lang="en-US" sz="1150" dirty="0">
-                        <a:latin typeface="Calibri" charset="0"/>
-                        <a:ea typeface="Calibri" charset="0"/>
-                        <a:cs typeface="Calibri" charset="0"/>
-                      </a:endParaRPr>
-                    </a:p>
-                  </a:txBody>
-                  <a:tcPr marL="91440" marR="91440" marT="45720" marB="45720" anchor="ctr">
-                    <a:lnL w="9525" cap="flat" cmpd="sng" algn="ctr">
-                      <a:solidFill>
-                        <a:srgbClr val="CADCFC"/>
-                      </a:solidFill>
-                      <a:prstDash val="solid"/>
-                      <a:round/>
-                      <a:headEnd type="none" w="med" len="med"/>
-                      <a:tailEnd type="none" w="med" len="med"/>
-                    </a:lnL>
-                    <a:lnR w="9525" cap="flat" cmpd="sng" algn="ctr">
-                      <a:solidFill>
-                        <a:srgbClr val="CADCFC"/>
-                      </a:solidFill>
-                      <a:prstDash val="solid"/>
-                      <a:round/>
-                      <a:headEnd type="none" w="med" len="med"/>
-                      <a:tailEnd type="none" w="med" len="med"/>
-                    </a:lnR>
-                    <a:lnT w="9525" cap="flat" cmpd="sng" algn="ctr">
-                      <a:solidFill>
-                        <a:srgbClr val="CADCFC"/>
-                      </a:solidFill>
-                      <a:prstDash val="solid"/>
-                      <a:round/>
-                      <a:headEnd type="none" w="med" len="med"/>
-                      <a:tailEnd type="none" w="med" len="med"/>
-                    </a:lnT>
-                    <a:lnB w="9525" cap="flat" cmpd="sng" algn="ctr">
-                      <a:solidFill>
-                        <a:srgbClr val="CADCFC"/>
-                      </a:solidFill>
-                      <a:prstDash val="solid"/>
-                      <a:round/>
-                      <a:headEnd type="none" w="med" len="med"/>
-                      <a:tailEnd type="none" w="med" len="med"/>
-                    </a:lnB>
-                  </a:tcPr>
-                </a:tc>
-              </a:tr>
-              <a:tr h="475488">
-                <a:tc>
-                  <a:txBody>
-                    <a:bodyPr/>
-                    <a:lstStyle/>
-                    <a:p>
-                      <a:pPr indent="0" marL="0">
-                        <a:buNone/>
-                      </a:pPr>
-                      <a:r>
-                        <a:rPr lang="en-US" sz="1150" dirty="0">
-                          <a:solidFill>
-                            <a:srgbClr val="1B1F3B"/>
-                          </a:solidFill>
-                          <a:latin typeface="Calibri" pitchFamily="34" charset="0"/>
-                          <a:ea typeface="Calibri" pitchFamily="34" charset="-122"/>
-                          <a:cs typeface="Calibri" pitchFamily="34" charset="-120"/>
-                        </a:rPr>
-                        <a:t>Data modelling standards — schema shape, what “raw” means literally</a:t>
-                      </a:r>
-                      <a:endParaRPr lang="en-US" sz="1150" dirty="0">
-                        <a:latin typeface="Calibri" charset="0"/>
-                        <a:ea typeface="Calibri" charset="0"/>
-                        <a:cs typeface="Calibri" charset="0"/>
-                      </a:endParaRPr>
-                    </a:p>
-                  </a:txBody>
-                  <a:tcPr marL="91440" marR="91440" marT="45720" marB="45720" anchor="ctr">
-                    <a:lnL w="9525" cap="flat" cmpd="sng" algn="ctr">
-                      <a:solidFill>
-                        <a:srgbClr val="CADCFC"/>
-                      </a:solidFill>
-                      <a:prstDash val="solid"/>
-                      <a:round/>
-                      <a:headEnd type="none" w="med" len="med"/>
-                      <a:tailEnd type="none" w="med" len="med"/>
-                    </a:lnL>
-                    <a:lnR w="9525" cap="flat" cmpd="sng" algn="ctr">
-                      <a:solidFill>
-                        <a:srgbClr val="CADCFC"/>
-                      </a:solidFill>
-                      <a:prstDash val="solid"/>
-                      <a:round/>
-                      <a:headEnd type="none" w="med" len="med"/>
-                      <a:tailEnd type="none" w="med" len="med"/>
-                    </a:lnR>
-                    <a:lnT w="9525" cap="flat" cmpd="sng" algn="ctr">
-                      <a:solidFill>
-                        <a:srgbClr val="CADCFC"/>
-                      </a:solidFill>
-                      <a:prstDash val="solid"/>
-                      <a:round/>
-                      <a:headEnd type="none" w="med" len="med"/>
-                      <a:tailEnd type="none" w="med" len="med"/>
-                    </a:lnT>
-                    <a:lnB w="9525" cap="flat" cmpd="sng" algn="ctr">
-                      <a:solidFill>
-                        <a:srgbClr val="CADCFC"/>
-                      </a:solidFill>
-                      <a:prstDash val="solid"/>
-                      <a:round/>
-                      <a:headEnd type="none" w="med" len="med"/>
-                      <a:tailEnd type="none" w="med" len="med"/>
-                    </a:lnB>
-                  </a:tcPr>
-                </a:tc>
-                <a:tc>
-                  <a:txBody>
-                    <a:bodyPr/>
-                    <a:lstStyle/>
-                    <a:p>
-                      <a:pPr indent="0" marL="0">
-                        <a:buNone/>
-                      </a:pPr>
-                      <a:r>
-                        <a:rPr lang="en-US" sz="1150" dirty="0">
-                          <a:solidFill>
-                            <a:srgbClr val="1B1F3B"/>
-                          </a:solidFill>
-                          <a:latin typeface="Calibri" pitchFamily="34" charset="0"/>
-                          <a:ea typeface="Calibri" pitchFamily="34" charset="-122"/>
-                          <a:cs typeface="Calibri" pitchFamily="34" charset="-120"/>
-                        </a:rPr>
-                        <a:t>Draft schema proposals with tradeoffs surfaced, not silently decided</a:t>
-                      </a:r>
-                      <a:endParaRPr lang="en-US" sz="1150" dirty="0">
-                        <a:latin typeface="Calibri" charset="0"/>
-                        <a:ea typeface="Calibri" charset="0"/>
-                        <a:cs typeface="Calibri" charset="0"/>
-                      </a:endParaRPr>
-                    </a:p>
-                  </a:txBody>
-                  <a:tcPr marL="91440" marR="91440" marT="45720" marB="45720" anchor="ctr">
-                    <a:lnL w="9525" cap="flat" cmpd="sng" algn="ctr">
-                      <a:solidFill>
-                        <a:srgbClr val="CADCFC"/>
-                      </a:solidFill>
-                      <a:prstDash val="solid"/>
-                      <a:round/>
-                      <a:headEnd type="none" w="med" len="med"/>
-                      <a:tailEnd type="none" w="med" len="med"/>
-                    </a:lnL>
-                    <a:lnR w="9525" cap="flat" cmpd="sng" algn="ctr">
-                      <a:solidFill>
-                        <a:srgbClr val="CADCFC"/>
-                      </a:solidFill>
-                      <a:prstDash val="solid"/>
-                      <a:round/>
-                      <a:headEnd type="none" w="med" len="med"/>
-                      <a:tailEnd type="none" w="med" len="med"/>
-                    </a:lnR>
-                    <a:lnT w="9525" cap="flat" cmpd="sng" algn="ctr">
-                      <a:solidFill>
-                        <a:srgbClr val="CADCFC"/>
-                      </a:solidFill>
-                      <a:prstDash val="solid"/>
-                      <a:round/>
-                      <a:headEnd type="none" w="med" len="med"/>
-                      <a:tailEnd type="none" w="med" len="med"/>
-                    </a:lnT>
-                    <a:lnB w="9525" cap="flat" cmpd="sng" algn="ctr">
-                      <a:solidFill>
-                        <a:srgbClr val="CADCFC"/>
-                      </a:solidFill>
-                      <a:prstDash val="solid"/>
-                      <a:round/>
-                      <a:headEnd type="none" w="med" len="med"/>
-                      <a:tailEnd type="none" w="med" len="med"/>
-                    </a:lnB>
-                  </a:tcPr>
-                </a:tc>
-              </a:tr>
-              <a:tr h="475488">
-                <a:tc>
-                  <a:txBody>
-                    <a:bodyPr/>
-                    <a:lstStyle/>
-                    <a:p>
-                      <a:pPr indent="0" marL="0">
-                        <a:buNone/>
-                      </a:pPr>
-                      <a:r>
-                        <a:rPr lang="en-US" sz="1150" dirty="0">
-                          <a:solidFill>
-                            <a:srgbClr val="1B1F3B"/>
-                          </a:solidFill>
-                          <a:latin typeface="Calibri" pitchFamily="34" charset="0"/>
-                          <a:ea typeface="Calibri" pitchFamily="34" charset="-122"/>
-                          <a:cs typeface="Calibri" pitchFamily="34" charset="-120"/>
-                        </a:rPr>
-                        <a:t>Deciding acceptance criteria for “done”</a:t>
-                      </a:r>
-                      <a:endParaRPr lang="en-US" sz="1150" dirty="0">
-                        <a:latin typeface="Calibri" charset="0"/>
-                        <a:ea typeface="Calibri" charset="0"/>
-                        <a:cs typeface="Calibri" charset="0"/>
-                      </a:endParaRPr>
-                    </a:p>
-                  </a:txBody>
-                  <a:tcPr marL="91440" marR="91440" marT="45720" marB="45720" anchor="ctr">
-                    <a:lnL w="9525" cap="flat" cmpd="sng" algn="ctr">
-                      <a:solidFill>
-                        <a:srgbClr val="CADCFC"/>
-                      </a:solidFill>
-                      <a:prstDash val="solid"/>
-                      <a:round/>
-                      <a:headEnd type="none" w="med" len="med"/>
-                      <a:tailEnd type="none" w="med" len="med"/>
-                    </a:lnL>
-                    <a:lnR w="9525" cap="flat" cmpd="sng" algn="ctr">
-                      <a:solidFill>
-                        <a:srgbClr val="CADCFC"/>
-                      </a:solidFill>
-                      <a:prstDash val="solid"/>
-                      <a:round/>
-                      <a:headEnd type="none" w="med" len="med"/>
-                      <a:tailEnd type="none" w="med" len="med"/>
-                    </a:lnR>
-                    <a:lnT w="9525" cap="flat" cmpd="sng" algn="ctr">
-                      <a:solidFill>
-                        <a:srgbClr val="CADCFC"/>
-                      </a:solidFill>
-                      <a:prstDash val="solid"/>
-                      <a:round/>
-                      <a:headEnd type="none" w="med" len="med"/>
-                      <a:tailEnd type="none" w="med" len="med"/>
-                    </a:lnT>
-                    <a:lnB w="9525" cap="flat" cmpd="sng" algn="ctr">
-                      <a:solidFill>
-                        <a:srgbClr val="CADCFC"/>
-                      </a:solidFill>
-                      <a:prstDash val="solid"/>
-                      <a:round/>
-                      <a:headEnd type="none" w="med" len="med"/>
-                      <a:tailEnd type="none" w="med" len="med"/>
-                    </a:lnB>
-                  </a:tcPr>
-                </a:tc>
-                <a:tc>
-                  <a:txBody>
-                    <a:bodyPr/>
-                    <a:lstStyle/>
-                    <a:p>
-                      <a:pPr indent="0" marL="0">
-                        <a:buNone/>
-                      </a:pPr>
-                      <a:r>
-                        <a:rPr lang="en-US" sz="1150" dirty="0">
-                          <a:solidFill>
-                            <a:srgbClr val="1B1F3B"/>
-                          </a:solidFill>
-                          <a:latin typeface="Calibri" pitchFamily="34" charset="0"/>
-                          <a:ea typeface="Calibri" pitchFamily="34" charset="-122"/>
-                          <a:cs typeface="Calibri" pitchFamily="34" charset="-120"/>
-                        </a:rPr>
-                        <a:t>Running against real data, reporting actual counts — not just “no exception”</a:t>
-                      </a:r>
-                      <a:endParaRPr lang="en-US" sz="1150" dirty="0">
-                        <a:latin typeface="Calibri" charset="0"/>
-                        <a:ea typeface="Calibri" charset="0"/>
-                        <a:cs typeface="Calibri" charset="0"/>
-                      </a:endParaRPr>
-                    </a:p>
-                  </a:txBody>
-                  <a:tcPr marL="91440" marR="91440" marT="45720" marB="45720" anchor="ctr">
-                    <a:lnL w="9525" cap="flat" cmpd="sng" algn="ctr">
-                      <a:solidFill>
-                        <a:srgbClr val="CADCFC"/>
-                      </a:solidFill>
-                      <a:prstDash val="solid"/>
-                      <a:round/>
-                      <a:headEnd type="none" w="med" len="med"/>
-                      <a:tailEnd type="none" w="med" len="med"/>
-                    </a:lnL>
-                    <a:lnR w="9525" cap="flat" cmpd="sng" algn="ctr">
-                      <a:solidFill>
-                        <a:srgbClr val="CADCFC"/>
-                      </a:solidFill>
-                      <a:prstDash val="solid"/>
-                      <a:round/>
-                      <a:headEnd type="none" w="med" len="med"/>
-                      <a:tailEnd type="none" w="med" len="med"/>
-                    </a:lnR>
-                    <a:lnT w="9525" cap="flat" cmpd="sng" algn="ctr">
-                      <a:solidFill>
-                        <a:srgbClr val="CADCFC"/>
-                      </a:solidFill>
-                      <a:prstDash val="solid"/>
-                      <a:round/>
-                      <a:headEnd type="none" w="med" len="med"/>
-                      <a:tailEnd type="none" w="med" len="med"/>
-                    </a:lnT>
-                    <a:lnB w="9525" cap="flat" cmpd="sng" algn="ctr">
-                      <a:solidFill>
-                        <a:srgbClr val="CADCFC"/>
-                      </a:solidFill>
-                      <a:prstDash val="solid"/>
-                      <a:round/>
-                      <a:headEnd type="none" w="med" len="med"/>
-                      <a:tailEnd type="none" w="med" len="med"/>
-                    </a:lnB>
-                  </a:tcPr>
-                </a:tc>
-              </a:tr>
-            </a:tbl>
-          </a:graphicData>
-        </a:graphic>
-      </p:graphicFrame>
-      <p:sp>
-        <p:nvSpPr>
-          <p:cNvPr id="7" name="Shape 3"/>
-          <p:cNvSpPr/>
-          <p:nvPr/>
-        </p:nvSpPr>
-        <p:spPr>
-          <a:xfrm>
-            <a:off x="548640" y="4434840"/>
-            <a:ext cx="5394960" cy="1965960"/>
+      <p:sp>
+        <p:nvSpPr>
+          <p:cNvPr id="6" name="Text 3"/>
+          <p:cNvSpPr/>
+          <p:nvPr/>
+        </p:nvSpPr>
+        <p:spPr>
+          <a:xfrm>
+            <a:off x="914400" y="1298448"/>
+            <a:ext cx="10360152" cy="457200"/>
+          </a:xfrm>
+          <a:prstGeom prst="rect">
+            <a:avLst/>
+          </a:prstGeom>
+          <a:noFill/>
+          <a:ln/>
+        </p:spPr>
+        <p:txBody>
+          <a:bodyPr wrap="square" rtlCol="0" anchor="ctr"/>
+          <a:lstStyle/>
+          <a:p>
+            <a:pPr algn="ctr" indent="0" marL="0">
+              <a:buNone/>
+            </a:pPr>
+            <a:r>
+              <a:rPr lang="en-US" sz="1250" i="1" dirty="0">
+                <a:solidFill>
+                  <a:srgbClr val="5B6280"/>
+                </a:solidFill>
+                <a:latin typeface="Calibri" pitchFamily="34" charset="0"/>
+                <a:ea typeface="Calibri" pitchFamily="34" charset="-122"/>
+                <a:cs typeface="Calibri" pitchFamily="34" charset="-120"/>
+              </a:rPr>
+              <a:t>As lead, I'm accountable for the standard: clear design up front, hands-on involvement where risk is highest, and guardrails that let analysts, engineers, and AI agents deliver safely at pace.</a:t>
+            </a:r>
+            <a:endParaRPr lang="en-US" sz="1250" dirty="0"/>
+          </a:p>
+        </p:txBody>
+      </p:sp>
+      <p:sp>
+        <p:nvSpPr>
+          <p:cNvPr id="7" name="Shape 4"/>
+          <p:cNvSpPr/>
+          <p:nvPr/>
+        </p:nvSpPr>
+        <p:spPr>
+          <a:xfrm>
+            <a:off x="548640" y="1965960"/>
+            <a:ext cx="5394960" cy="1691640"/>
           </a:xfrm>
           <a:prstGeom prst="roundRect">
             <a:avLst>
-              <a:gd name="adj" fmla="val 5581"/>
+              <a:gd name="adj" fmla="val 6486"/>
             </a:avLst>
           </a:prstGeom>
           <a:solidFill>
@@ -11936,14 +11147,14 @@
       </p:sp>
       <p:sp>
         <p:nvSpPr>
-          <p:cNvPr id="8" name="Text 4"/>
-          <p:cNvSpPr/>
-          <p:nvPr/>
-        </p:nvSpPr>
-        <p:spPr>
-          <a:xfrm>
-            <a:off x="777240" y="4572000"/>
-            <a:ext cx="4937760" cy="457200"/>
+          <p:cNvPr id="8" name="Text 5"/>
+          <p:cNvSpPr/>
+          <p:nvPr/>
+        </p:nvSpPr>
+        <p:spPr>
+          <a:xfrm>
+            <a:off x="804672" y="2130552"/>
+            <a:ext cx="4882896" cy="365760"/>
           </a:xfrm>
           <a:prstGeom prst="rect">
             <a:avLst/>
@@ -11959,30 +11170,30 @@
               <a:buNone/>
             </a:pPr>
             <a:r>
-              <a:rPr lang="en-US" sz="1300" b="1" dirty="0">
-                <a:solidFill>
-                  <a:srgbClr val="CADCFC"/>
-                </a:solidFill>
-                <a:latin typeface="Calibri" pitchFamily="34" charset="0"/>
-                <a:ea typeface="Calibri" pitchFamily="34" charset="-122"/>
-                <a:cs typeface="Calibri" pitchFamily="34" charset="-120"/>
-              </a:rPr>
-              <a:t>Review was iterative, not one-pass</a:t>
-            </a:r>
-            <a:endParaRPr lang="en-US" sz="1300" dirty="0"/>
-          </a:p>
-        </p:txBody>
-      </p:sp>
-      <p:sp>
-        <p:nvSpPr>
-          <p:cNvPr id="9" name="Text 5"/>
-          <p:cNvSpPr/>
-          <p:nvPr/>
-        </p:nvSpPr>
-        <p:spPr>
-          <a:xfrm>
-            <a:off x="777240" y="5029200"/>
-            <a:ext cx="4937760" cy="1280160"/>
+              <a:rPr lang="en-US" sz="1400" b="1" dirty="0">
+                <a:solidFill>
+                  <a:srgbClr val="FFFFFF"/>
+                </a:solidFill>
+                <a:latin typeface="Calibri" pitchFamily="34" charset="0"/>
+                <a:ea typeface="Calibri" pitchFamily="34" charset="-122"/>
+                <a:cs typeface="Calibri" pitchFamily="34" charset="-120"/>
+              </a:rPr>
+              <a:t>Architect</a:t>
+            </a:r>
+            <a:endParaRPr lang="en-US" sz="1400" dirty="0"/>
+          </a:p>
+        </p:txBody>
+      </p:sp>
+      <p:sp>
+        <p:nvSpPr>
+          <p:cNvPr id="9" name="Text 6"/>
+          <p:cNvSpPr/>
+          <p:nvPr/>
+        </p:nvSpPr>
+        <p:spPr>
+          <a:xfrm>
+            <a:off x="804672" y="2532888"/>
+            <a:ext cx="4882896" cy="960120"/>
           </a:xfrm>
           <a:prstGeom prst="rect">
             <a:avLst/>
@@ -11996,12 +11207,12 @@
           <a:p>
             <a:pPr indent="0" marL="0">
               <a:lnSpc>
-                <a:spcPct val="125000"/>
+                <a:spcPct val="122000"/>
               </a:lnSpc>
               <a:buNone/>
             </a:pPr>
             <a:r>
-              <a:rPr lang="en-US" sz="1100" dirty="0">
+              <a:rPr lang="en-US" sz="1080" dirty="0">
                 <a:solidFill>
                   <a:srgbClr val="FFFFFF"/>
                 </a:solidFill>
@@ -12009,26 +11220,26 @@
                 <a:ea typeface="Calibri" pitchFamily="34" charset="-122"/>
                 <a:cs typeface="Calibri" pitchFamily="34" charset="-120"/>
               </a:rPr>
-              <a:t>The RAG rule went through three passes: a first draft, a boundary and near-zero-denominator fix once a real failure mode surfaced, then a lookback-window fix once it ran against real data and returned zero populated rows. Each pass came from checking actual output, not re-reading code.</a:t>
-            </a:r>
-            <a:endParaRPr lang="en-US" sz="1100" dirty="0"/>
-          </a:p>
-        </p:txBody>
-      </p:sp>
-      <p:sp>
-        <p:nvSpPr>
-          <p:cNvPr id="10" name="Shape 6"/>
-          <p:cNvSpPr/>
-          <p:nvPr/>
-        </p:nvSpPr>
-        <p:spPr>
-          <a:xfrm>
-            <a:off x="6126480" y="4434840"/>
-            <a:ext cx="5513832" cy="1965960"/>
+              <a:t>Define the data model, layer boundaries, metric definitions, and acceptance criteria before code starts. The raw/silver/curated split and every metric definition in this build were mine — decided before anyone touched implementation.</a:t>
+            </a:r>
+            <a:endParaRPr lang="en-US" sz="1080" dirty="0"/>
+          </a:p>
+        </p:txBody>
+      </p:sp>
+      <p:sp>
+        <p:nvSpPr>
+          <p:cNvPr id="10" name="Shape 7"/>
+          <p:cNvSpPr/>
+          <p:nvPr/>
+        </p:nvSpPr>
+        <p:spPr>
+          <a:xfrm>
+            <a:off x="6245352" y="1965960"/>
+            <a:ext cx="5394960" cy="1691640"/>
           </a:xfrm>
           <a:prstGeom prst="roundRect">
             <a:avLst>
-              <a:gd name="adj" fmla="val 5581"/>
+              <a:gd name="adj" fmla="val 6486"/>
             </a:avLst>
           </a:prstGeom>
           <a:solidFill>
@@ -12039,14 +11250,14 @@
       </p:sp>
       <p:sp>
         <p:nvSpPr>
-          <p:cNvPr id="11" name="Text 7"/>
-          <p:cNvSpPr/>
-          <p:nvPr/>
-        </p:nvSpPr>
-        <p:spPr>
-          <a:xfrm>
-            <a:off x="6355080" y="4572000"/>
-            <a:ext cx="5029200" cy="457200"/>
+          <p:cNvPr id="11" name="Text 8"/>
+          <p:cNvSpPr/>
+          <p:nvPr/>
+        </p:nvSpPr>
+        <p:spPr>
+          <a:xfrm>
+            <a:off x="6501384" y="2130552"/>
+            <a:ext cx="4882896" cy="365760"/>
           </a:xfrm>
           <a:prstGeom prst="rect">
             <a:avLst/>
@@ -12062,7 +11273,7 @@
               <a:buNone/>
             </a:pPr>
             <a:r>
-              <a:rPr lang="en-US" sz="1300" b="1" dirty="0">
+              <a:rPr lang="en-US" sz="1400" b="1" dirty="0">
                 <a:solidFill>
                   <a:srgbClr val="1E2761"/>
                 </a:solidFill>
@@ -12070,22 +11281,22 @@
                 <a:ea typeface="Calibri" pitchFamily="34" charset="-122"/>
                 <a:cs typeface="Calibri" pitchFamily="34" charset="-120"/>
               </a:rPr>
-              <a:t>How this becomes a handoff model</a:t>
-            </a:r>
-            <a:endParaRPr lang="en-US" sz="1300" dirty="0"/>
-          </a:p>
-        </p:txBody>
-      </p:sp>
-      <p:sp>
-        <p:nvSpPr>
-          <p:cNvPr id="12" name="Text 8"/>
-          <p:cNvSpPr/>
-          <p:nvPr/>
-        </p:nvSpPr>
-        <p:spPr>
-          <a:xfrm>
-            <a:off x="6355080" y="5029200"/>
-            <a:ext cx="5029200" cy="1280160"/>
+              <a:t>Hands-on engineer</a:t>
+            </a:r>
+            <a:endParaRPr lang="en-US" sz="1400" dirty="0"/>
+          </a:p>
+        </p:txBody>
+      </p:sp>
+      <p:sp>
+        <p:nvSpPr>
+          <p:cNvPr id="12" name="Text 9"/>
+          <p:cNvSpPr/>
+          <p:nvPr/>
+        </p:nvSpPr>
+        <p:spPr>
+          <a:xfrm>
+            <a:off x="6501384" y="2532888"/>
+            <a:ext cx="4882896" cy="960120"/>
           </a:xfrm>
           <a:prstGeom prst="rect">
             <a:avLst/>
@@ -12099,12 +11310,12 @@
           <a:p>
             <a:pPr indent="0" marL="0">
               <a:lnSpc>
-                <a:spcPct val="125000"/>
+                <a:spcPct val="122000"/>
               </a:lnSpc>
               <a:buNone/>
             </a:pPr>
             <a:r>
-              <a:rPr lang="en-US" sz="1100" dirty="0">
+              <a:rPr lang="en-US" sz="1080" dirty="0">
                 <a:solidFill>
                   <a:srgbClr val="1B1F3B"/>
                 </a:solidFill>
@@ -12112,15 +11323,221 @@
                 <a:ea typeface="Calibri" pitchFamily="34" charset="-122"/>
                 <a:cs typeface="Calibri" pitchFamily="34" charset="-120"/>
               </a:rPr>
-              <a:t>Every schema-level decision — metric definitions, then the mart design — went through a written proposal, signed off before code: the artifact I'd hand a new hire or agent to onboard onto this codebase. When a second agent joined mid-build, I split file ownership explicitly, not left it to chance.</a:t>
-            </a:r>
-            <a:endParaRPr lang="en-US" sz="1100" dirty="0"/>
-          </a:p>
-        </p:txBody>
-      </p:sp>
-      <p:sp>
-        <p:nvSpPr>
-          <p:cNvPr id="13" name="Text 9"/>
+              <a:t>Build or co-build the highest-risk parts myself — source contracts, transformation logic, DQ controls, dashboard semantics. Here that meant directing the raw-fidelity fix and sizing the RAG lookback window myself, not just approving someone else's.</a:t>
+            </a:r>
+            <a:endParaRPr lang="en-US" sz="1080" dirty="0"/>
+          </a:p>
+        </p:txBody>
+      </p:sp>
+      <p:sp>
+        <p:nvSpPr>
+          <p:cNvPr id="13" name="Shape 10"/>
+          <p:cNvSpPr/>
+          <p:nvPr/>
+        </p:nvSpPr>
+        <p:spPr>
+          <a:xfrm>
+            <a:off x="548640" y="3931920"/>
+            <a:ext cx="5394960" cy="1691640"/>
+          </a:xfrm>
+          <a:prstGeom prst="roundRect">
+            <a:avLst>
+              <a:gd name="adj" fmla="val 6486"/>
+            </a:avLst>
+          </a:prstGeom>
+          <a:solidFill>
+            <a:srgbClr val="EEF3FD"/>
+          </a:solidFill>
+          <a:ln/>
+        </p:spPr>
+      </p:sp>
+      <p:sp>
+        <p:nvSpPr>
+          <p:cNvPr id="14" name="Text 11"/>
+          <p:cNvSpPr/>
+          <p:nvPr/>
+        </p:nvSpPr>
+        <p:spPr>
+          <a:xfrm>
+            <a:off x="804672" y="4096512"/>
+            <a:ext cx="4882896" cy="365760"/>
+          </a:xfrm>
+          <a:prstGeom prst="rect">
+            <a:avLst/>
+          </a:prstGeom>
+          <a:noFill/>
+          <a:ln/>
+        </p:spPr>
+        <p:txBody>
+          <a:bodyPr wrap="square" rtlCol="0" anchor="ctr"/>
+          <a:lstStyle/>
+          <a:p>
+            <a:pPr indent="0" marL="0">
+              <a:buNone/>
+            </a:pPr>
+            <a:r>
+              <a:rPr lang="en-US" sz="1400" b="1" dirty="0">
+                <a:solidFill>
+                  <a:srgbClr val="1E2761"/>
+                </a:solidFill>
+                <a:latin typeface="Calibri" pitchFamily="34" charset="0"/>
+                <a:ea typeface="Calibri" pitchFamily="34" charset="-122"/>
+                <a:cs typeface="Calibri" pitchFamily="34" charset="-120"/>
+              </a:rPr>
+              <a:t>Quality gate</a:t>
+            </a:r>
+            <a:endParaRPr lang="en-US" sz="1400" dirty="0"/>
+          </a:p>
+        </p:txBody>
+      </p:sp>
+      <p:sp>
+        <p:nvSpPr>
+          <p:cNvPr id="15" name="Text 12"/>
+          <p:cNvSpPr/>
+          <p:nvPr/>
+        </p:nvSpPr>
+        <p:spPr>
+          <a:xfrm>
+            <a:off x="804672" y="4498848"/>
+            <a:ext cx="4882896" cy="960120"/>
+          </a:xfrm>
+          <a:prstGeom prst="rect">
+            <a:avLst/>
+          </a:prstGeom>
+          <a:noFill/>
+          <a:ln/>
+        </p:spPr>
+        <p:txBody>
+          <a:bodyPr wrap="square" rtlCol="0" anchor="t"/>
+          <a:lstStyle/>
+          <a:p>
+            <a:pPr indent="0" marL="0">
+              <a:lnSpc>
+                <a:spcPct val="122000"/>
+              </a:lnSpc>
+              <a:buNone/>
+            </a:pPr>
+            <a:r>
+              <a:rPr lang="en-US" sz="1080" dirty="0">
+                <a:solidFill>
+                  <a:srgbClr val="1B1F3B"/>
+                </a:solidFill>
+                <a:latin typeface="Calibri" pitchFamily="34" charset="0"/>
+                <a:ea typeface="Calibri" pitchFamily="34" charset="-122"/>
+                <a:cs typeface="Calibri" pitchFamily="34" charset="-120"/>
+              </a:rPr>
+              <a:t>Review outputs from analysts, engineers, and agents the same way — against correctness, real data, and definition-of-done — before anything is accepted. That bar is what caught two real DQ bugs and a signal that ran clean but returned zero rows.</a:t>
+            </a:r>
+            <a:endParaRPr lang="en-US" sz="1080" dirty="0"/>
+          </a:p>
+        </p:txBody>
+      </p:sp>
+      <p:sp>
+        <p:nvSpPr>
+          <p:cNvPr id="16" name="Shape 13"/>
+          <p:cNvSpPr/>
+          <p:nvPr/>
+        </p:nvSpPr>
+        <p:spPr>
+          <a:xfrm>
+            <a:off x="6245352" y="3931920"/>
+            <a:ext cx="5394960" cy="1691640"/>
+          </a:xfrm>
+          <a:prstGeom prst="roundRect">
+            <a:avLst>
+              <a:gd name="adj" fmla="val 6486"/>
+            </a:avLst>
+          </a:prstGeom>
+          <a:solidFill>
+            <a:srgbClr val="1E2761"/>
+          </a:solidFill>
+          <a:ln/>
+        </p:spPr>
+      </p:sp>
+      <p:sp>
+        <p:nvSpPr>
+          <p:cNvPr id="17" name="Text 14"/>
+          <p:cNvSpPr/>
+          <p:nvPr/>
+        </p:nvSpPr>
+        <p:spPr>
+          <a:xfrm>
+            <a:off x="6501384" y="4096512"/>
+            <a:ext cx="4882896" cy="365760"/>
+          </a:xfrm>
+          <a:prstGeom prst="rect">
+            <a:avLst/>
+          </a:prstGeom>
+          <a:noFill/>
+          <a:ln/>
+        </p:spPr>
+        <p:txBody>
+          <a:bodyPr wrap="square" rtlCol="0" anchor="ctr"/>
+          <a:lstStyle/>
+          <a:p>
+            <a:pPr indent="0" marL="0">
+              <a:buNone/>
+            </a:pPr>
+            <a:r>
+              <a:rPr lang="en-US" sz="1400" b="1" dirty="0">
+                <a:solidFill>
+                  <a:srgbClr val="FFFFFF"/>
+                </a:solidFill>
+                <a:latin typeface="Calibri" pitchFamily="34" charset="0"/>
+                <a:ea typeface="Calibri" pitchFamily="34" charset="-122"/>
+                <a:cs typeface="Calibri" pitchFamily="34" charset="-120"/>
+              </a:rPr>
+              <a:t>Coach &amp; scale-enabler</a:t>
+            </a:r>
+            <a:endParaRPr lang="en-US" sz="1400" dirty="0"/>
+          </a:p>
+        </p:txBody>
+      </p:sp>
+      <p:sp>
+        <p:nvSpPr>
+          <p:cNvPr id="18" name="Text 15"/>
+          <p:cNvSpPr/>
+          <p:nvPr/>
+        </p:nvSpPr>
+        <p:spPr>
+          <a:xfrm>
+            <a:off x="6501384" y="4498848"/>
+            <a:ext cx="4882896" cy="960120"/>
+          </a:xfrm>
+          <a:prstGeom prst="rect">
+            <a:avLst/>
+          </a:prstGeom>
+          <a:noFill/>
+          <a:ln/>
+        </p:spPr>
+        <p:txBody>
+          <a:bodyPr wrap="square" rtlCol="0" anchor="t"/>
+          <a:lstStyle/>
+          <a:p>
+            <a:pPr indent="0" marL="0">
+              <a:lnSpc>
+                <a:spcPct val="122000"/>
+              </a:lnSpc>
+              <a:buNone/>
+            </a:pPr>
+            <a:r>
+              <a:rPr lang="en-US" sz="1080" dirty="0">
+                <a:solidFill>
+                  <a:srgbClr val="FFFFFF"/>
+                </a:solidFill>
+                <a:latin typeface="Calibri" pitchFamily="34" charset="0"/>
+                <a:ea typeface="Calibri" pitchFamily="34" charset="-122"/>
+                <a:cs typeface="Calibri" pitchFamily="34" charset="-120"/>
+              </a:rPr>
+              <a:t>Create reusable patterns, design docs, and guardrails so the team delivers consistently without tribal knowledge. The design-doc-before-code gate is the onboarding artifact itself — it's also how I split ownership the moment a second contributor joined mid-build.</a:t>
+            </a:r>
+            <a:endParaRPr lang="en-US" sz="1080" dirty="0"/>
+          </a:p>
+        </p:txBody>
+      </p:sp>
+      <p:sp>
+        <p:nvSpPr>
+          <p:cNvPr id="19" name="Text 16"/>
           <p:cNvSpPr/>
           <p:nvPr/>
         </p:nvSpPr>
@@ -12159,7 +11576,7 @@
       </p:sp>
       <p:sp>
         <p:nvSpPr>
-          <p:cNvPr id="14" name="Text 10"/>
+          <p:cNvPr id="20" name="Text 17"/>
           <p:cNvSpPr/>
           <p:nvPr/>
         </p:nvSpPr>

--- a/presentation/Market_Intelligence_Platform.pptx
+++ b/presentation/Market_Intelligence_Platform.pptx
@@ -9346,7 +9346,7 @@
                 <a:ea typeface="Calibri" pitchFamily="34" charset="-122"/>
                 <a:cs typeface="Calibri" pitchFamily="34" charset="-120"/>
               </a:rPr>
-              <a:t>ASX 200 on a single axis; the RBA cash rate shown as shaded background bands, not a second line on a second axis — simpler to read at a glance.</a:t>
+              <a:t>ASX 200 and the RBA cash rate, each on its own axis in its own units — the rate as a step line, since it's genuinely constant between RBA decisions, not smoothly drifting.</a:t>
             </a:r>
             <a:endParaRPr lang="en-US" sz="1150" dirty="0"/>
           </a:p>
@@ -9927,7 +9927,7 @@
                 <a:ea typeface="Calibri" pitchFamily="34" charset="-122"/>
                 <a:cs typeface="Calibri" pitchFamily="34" charset="-120"/>
               </a:rPr>
-              <a:t>One plain-language explainer, written for both audiences — the exact formulas behind every KPI, why the macro overlay dropped its dual axis, and precise definitions for every DQ status — all traceable to real table/function names, and kept in sync with docs/metric_definitions.md rather than re-explained twice.</a:t>
+              <a:t>One plain-language explainer, written for both audiences — the exact formulas behind every KPI, why the macro overlay's cash rate is drawn as a step line rather than a straight interpolation, and precise definitions for every DQ status — all traceable to real table/function names, and kept in sync with docs/metric_definitions.md rather than re-explained twice.</a:t>
             </a:r>
             <a:endParaRPr lang="en-US" sz="1200" dirty="0"/>
           </a:p>
